--- a/docs/showcase/orchestration-run/fabrikam-seed.pptx
+++ b/docs/showcase/orchestration-run/fabrikam-seed.pptx
@@ -1085,7 +1085,14 @@
           <a:p>
             <a:r>
               <a:rPr lang="en-US" dirty="0"/>
-              <a:t/>
+              <a:t>[Sources]</a:t>
+            </a:r>
+            <a:endParaRPr lang="en-US" dirty="0"/>
+          </a:p>
+          <a:p>
+            <a:r>
+              <a:rPr lang="en-US" dirty="0"/>
+              <a:t>- Fabrikam market estimate (top-down and bottom-up), 2026 — illustrative data</a:t>
             </a:r>
             <a:endParaRPr lang="en-US" dirty="0"/>
           </a:p>
@@ -1173,7 +1180,14 @@
           <a:p>
             <a:r>
               <a:rPr lang="en-US" dirty="0"/>
-              <a:t/>
+              <a:t>[Sources]</a:t>
+            </a:r>
+            <a:endParaRPr lang="en-US" dirty="0"/>
+          </a:p>
+          <a:p>
+            <a:r>
+              <a:rPr lang="en-US" dirty="0"/>
+              <a:t>- Fabrikam platform metrics, Sep 2026 — illustrative data</a:t>
             </a:r>
             <a:endParaRPr lang="en-US" dirty="0"/>
           </a:p>
@@ -1261,7 +1275,14 @@
           <a:p>
             <a:r>
               <a:rPr lang="en-US" dirty="0"/>
-              <a:t/>
+              <a:t>[Sources]</a:t>
+            </a:r>
+            <a:endParaRPr lang="en-US" dirty="0"/>
+          </a:p>
+          <a:p>
+            <a:r>
+              <a:rPr lang="en-US" dirty="0"/>
+              <a:t>- Fabrikam market estimate (top-down and bottom-up), 2026 — illustrative data</a:t>
             </a:r>
             <a:endParaRPr lang="en-US" dirty="0"/>
           </a:p>
@@ -1349,7 +1370,14 @@
           <a:p>
             <a:r>
               <a:rPr lang="en-US" dirty="0"/>
-              <a:t/>
+              <a:t>[Sources]</a:t>
+            </a:r>
+            <a:endParaRPr lang="en-US" dirty="0"/>
+          </a:p>
+          <a:p>
+            <a:r>
+              <a:rPr lang="en-US" dirty="0"/>
+              <a:t>- Fabrikam platform metrics, Sep 2026 — illustrative data</a:t>
             </a:r>
             <a:endParaRPr lang="en-US" dirty="0"/>
           </a:p>
@@ -1525,7 +1553,14 @@
           <a:p>
             <a:r>
               <a:rPr lang="en-US" dirty="0"/>
-              <a:t/>
+              <a:t>[Sources]</a:t>
+            </a:r>
+            <a:endParaRPr lang="en-US" dirty="0"/>
+          </a:p>
+          <a:p>
+            <a:r>
+              <a:rPr lang="en-US" dirty="0"/>
+              <a:t>- Fabrikam platform metrics, Sep 2026 — illustrative data</a:t>
             </a:r>
             <a:endParaRPr lang="en-US" dirty="0"/>
           </a:p>
@@ -1613,7 +1648,14 @@
           <a:p>
             <a:r>
               <a:rPr lang="en-US" dirty="0"/>
-              <a:t/>
+              <a:t>[Sources]</a:t>
+            </a:r>
+            <a:endParaRPr lang="en-US" dirty="0"/>
+          </a:p>
+          <a:p>
+            <a:r>
+              <a:rPr lang="en-US" dirty="0"/>
+              <a:t>- Founder profiles (fictional)</a:t>
             </a:r>
             <a:endParaRPr lang="en-US" dirty="0"/>
           </a:p>
@@ -1701,7 +1743,14 @@
           <a:p>
             <a:r>
               <a:rPr lang="en-US" dirty="0"/>
-              <a:t/>
+              <a:t>[Sources]</a:t>
+            </a:r>
+            <a:endParaRPr lang="en-US" dirty="0"/>
+          </a:p>
+          <a:p>
+            <a:r>
+              <a:rPr lang="en-US" dirty="0"/>
+              <a:t>- Fabrikam platform metrics, Sep 2026 — illustrative data</a:t>
             </a:r>
             <a:endParaRPr lang="en-US" dirty="0"/>
           </a:p>
